--- a/media/resources/files/EkiOrunduuOnduktar_Boluu_BingoOyunu_lFe86jX.pptx
+++ b/media/resources/files/EkiOrunduuOnduktar_Boluu_BingoOyunu_lFe86jX.pptx
@@ -29133,7 +29133,7 @@
             </a:pPr>
             <a:r>
               <a:rPr lang="ru-RU" dirty="0"/>
-              <a:t>Турдуу пикирлер учун ыраазычылык билдиребиз.</a:t>
+              <a:t>Түрдүү пикирлер үчүн ыраазычылык билдиребиз.</a:t>
             </a:r>
           </a:p>
           <a:p>

--- a/media/resources/files/EkiOrunduuOnduktar_Boluu_BingoOyunu_lFe86jX.pptx
+++ b/media/resources/files/EkiOrunduuOnduktar_Boluu_BingoOyunu_lFe86jX.pptx
@@ -7428,7 +7428,7 @@
                 <a:ea typeface="+mn-ea"/>
                 <a:cs typeface="+mn-cs"/>
               </a:rPr>
-              <a:t>Окуучулар </a:t>
+              <a:t>Окуучулар тордон тогуз жоопту тандап, дептердеги 3х3 чакмакка каалагандай коюшат.</a:t>
             </a:r>
             <a:r>
               <a:rPr kumimoji="0" lang="ru-RU" sz="2400" b="0" i="0" u="none" strike="noStrike" kern="1200" cap="none" spc="0" normalizeH="0" baseline="0" noProof="0" dirty="0">
@@ -7445,7 +7445,7 @@
                 <a:ea typeface="+mn-ea"/>
                 <a:cs typeface="+mn-cs"/>
               </a:rPr>
-              <a:t>суроо</a:t>
+              <a:t/>
             </a:r>
             <a:r>
               <a:rPr kumimoji="0" lang="en-US" sz="2400" b="0" i="0" u="none" strike="noStrike" kern="1200" cap="none" spc="0" normalizeH="0" baseline="0" noProof="0" dirty="0">
@@ -7462,7 +7462,7 @@
                 <a:ea typeface="+mn-ea"/>
                 <a:cs typeface="+mn-cs"/>
               </a:rPr>
-              <a:t> </a:t>
+              <a:t/>
             </a:r>
             <a:r>
               <a:rPr kumimoji="0" lang="en-US" sz="2400" b="0" i="0" u="none" strike="noStrike" kern="1200" cap="none" spc="0" normalizeH="0" baseline="0" noProof="0" dirty="0" err="1">
@@ -7479,7 +7479,7 @@
                 <a:ea typeface="+mn-ea"/>
                 <a:cs typeface="+mn-cs"/>
               </a:rPr>
-              <a:t>тордон</a:t>
+              <a:t/>
             </a:r>
             <a:r>
               <a:rPr kumimoji="0" lang="en-US" sz="2400" b="0" i="0" u="none" strike="noStrike" kern="1200" cap="none" spc="0" normalizeH="0" baseline="0" noProof="0" dirty="0">
@@ -7496,7 +7496,7 @@
                 <a:ea typeface="+mn-ea"/>
                 <a:cs typeface="+mn-cs"/>
               </a:rPr>
-              <a:t> </a:t>
+              <a:t/>
             </a:r>
             <a:r>
               <a:rPr kumimoji="0" lang="en-US" sz="2000" b="0" i="0" u="none" strike="noStrike" kern="1200" cap="none" spc="0" normalizeH="0" baseline="0" noProof="0" dirty="0" err="1">
@@ -7513,7 +7513,7 @@
                 <a:ea typeface="+mn-ea"/>
                 <a:cs typeface="+mn-cs"/>
               </a:rPr>
-              <a:t>тогуз</a:t>
+              <a:t/>
             </a:r>
             <a:r>
               <a:rPr kumimoji="0" lang="en-US" sz="2000" b="0" i="0" u="none" strike="noStrike" kern="1200" cap="none" spc="0" normalizeH="0" baseline="0" noProof="0" dirty="0">
@@ -7530,7 +7530,7 @@
                 <a:ea typeface="+mn-ea"/>
                 <a:cs typeface="+mn-cs"/>
               </a:rPr>
-              <a:t> </a:t>
+              <a:t/>
             </a:r>
             <a:r>
               <a:rPr kumimoji="0" lang="en-US" sz="2000" b="0" i="0" u="none" strike="noStrike" kern="1200" cap="none" spc="0" normalizeH="0" baseline="0" noProof="0" dirty="0" err="1">
@@ -7547,7 +7547,7 @@
                 <a:ea typeface="+mn-ea"/>
                 <a:cs typeface="+mn-cs"/>
               </a:rPr>
-              <a:t>жоопту</a:t>
+              <a:t/>
             </a:r>
             <a:r>
               <a:rPr kumimoji="0" lang="en-US" sz="2000" b="0" i="0" u="none" strike="noStrike" kern="1200" cap="none" spc="0" normalizeH="0" baseline="0" noProof="0" dirty="0">
@@ -7564,7 +7564,7 @@
                 <a:ea typeface="+mn-ea"/>
                 <a:cs typeface="+mn-cs"/>
               </a:rPr>
-              <a:t> </a:t>
+              <a:t/>
             </a:r>
             <a:r>
               <a:rPr kumimoji="0" lang="en-US" sz="2000" b="0" i="0" u="none" strike="noStrike" kern="1200" cap="none" spc="0" normalizeH="0" baseline="0" noProof="0" dirty="0" err="1">
@@ -7581,7 +7581,7 @@
                 <a:ea typeface="+mn-ea"/>
                 <a:cs typeface="+mn-cs"/>
               </a:rPr>
-              <a:t>тандап</a:t>
+              <a:t/>
             </a:r>
             <a:r>
               <a:rPr kumimoji="0" lang="en-US" sz="2000" b="0" i="0" u="none" strike="noStrike" kern="1200" cap="none" spc="0" normalizeH="0" baseline="0" noProof="0" dirty="0">
@@ -7598,7 +7598,7 @@
                 <a:ea typeface="+mn-ea"/>
                 <a:cs typeface="+mn-cs"/>
               </a:rPr>
-              <a:t>, </a:t>
+              <a:t/>
             </a:r>
             <a:r>
               <a:rPr kumimoji="0" lang="en-US" sz="2000" b="0" i="0" u="none" strike="noStrike" kern="1200" cap="none" spc="0" normalizeH="0" baseline="0" noProof="0" dirty="0" err="1">
@@ -7615,7 +7615,7 @@
                 <a:ea typeface="+mn-ea"/>
                 <a:cs typeface="+mn-cs"/>
               </a:rPr>
-              <a:t>аларды</a:t>
+              <a:t/>
             </a:r>
             <a:r>
               <a:rPr kumimoji="0" lang="en-US" sz="2000" b="0" i="0" u="none" strike="noStrike" kern="1200" cap="none" spc="0" normalizeH="0" baseline="0" noProof="0" dirty="0">
@@ -7632,7 +7632,7 @@
                 <a:ea typeface="+mn-ea"/>
                 <a:cs typeface="+mn-cs"/>
               </a:rPr>
-              <a:t> </a:t>
+              <a:t/>
             </a:r>
             <a:r>
               <a:rPr kumimoji="0" lang="ru-RU" sz="2000" b="0" i="0" u="none" strike="noStrike" kern="1200" cap="none" spc="0" normalizeH="0" baseline="0" noProof="0" dirty="0">
@@ -7649,7 +7649,7 @@
                 <a:ea typeface="+mn-ea"/>
                 <a:cs typeface="+mn-cs"/>
               </a:rPr>
-              <a:t>дептериндеги</a:t>
+              <a:t/>
             </a:r>
             <a:r>
               <a:rPr kumimoji="0" lang="en-US" sz="2000" b="0" i="0" u="none" strike="noStrike" kern="1200" cap="none" spc="0" normalizeH="0" baseline="0" noProof="0" dirty="0">
@@ -7666,7 +7666,7 @@
                 <a:ea typeface="+mn-ea"/>
                 <a:cs typeface="+mn-cs"/>
               </a:rPr>
-              <a:t> 3х3 </a:t>
+              <a:t/>
             </a:r>
             <a:r>
               <a:rPr kumimoji="0" lang="en-US" sz="2000" b="0" i="0" u="none" strike="noStrike" kern="1200" cap="none" spc="0" normalizeH="0" baseline="0" noProof="0" dirty="0" err="1">
@@ -7683,7 +7683,7 @@
                 <a:ea typeface="+mn-ea"/>
                 <a:cs typeface="+mn-cs"/>
               </a:rPr>
-              <a:t>квадратка</a:t>
+              <a:t/>
             </a:r>
             <a:r>
               <a:rPr kumimoji="0" lang="en-US" sz="2000" b="0" i="0" u="none" strike="noStrike" kern="1200" cap="none" spc="0" normalizeH="0" baseline="0" noProof="0" dirty="0">
@@ -7700,7 +7700,7 @@
                 <a:ea typeface="+mn-ea"/>
                 <a:cs typeface="+mn-cs"/>
               </a:rPr>
-              <a:t> </a:t>
+              <a:t/>
             </a:r>
             <a:r>
               <a:rPr kumimoji="0" lang="en-US" sz="2000" b="0" i="0" u="none" strike="noStrike" kern="1200" cap="none" spc="0" normalizeH="0" baseline="0" noProof="0" dirty="0" err="1">
@@ -7717,7 +7717,7 @@
                 <a:ea typeface="+mn-ea"/>
                 <a:cs typeface="+mn-cs"/>
               </a:rPr>
-              <a:t>туш</a:t>
+              <a:t/>
             </a:r>
             <a:r>
               <a:rPr kumimoji="0" lang="en-US" sz="2000" b="0" i="0" u="none" strike="noStrike" kern="1200" cap="none" spc="0" normalizeH="0" baseline="0" noProof="0" dirty="0">
@@ -7734,7 +7734,7 @@
                 <a:ea typeface="+mn-ea"/>
                 <a:cs typeface="+mn-cs"/>
               </a:rPr>
-              <a:t> </a:t>
+              <a:t/>
             </a:r>
             <a:r>
               <a:rPr kumimoji="0" lang="en-US" sz="2000" b="0" i="0" u="none" strike="noStrike" kern="1200" cap="none" spc="0" normalizeH="0" baseline="0" noProof="0" dirty="0" err="1">
@@ -7751,7 +7751,7 @@
                 <a:ea typeface="+mn-ea"/>
                 <a:cs typeface="+mn-cs"/>
               </a:rPr>
-              <a:t>келди</a:t>
+              <a:t/>
             </a:r>
             <a:r>
               <a:rPr kumimoji="0" lang="en-US" sz="2000" b="0" i="0" u="none" strike="noStrike" kern="1200" cap="none" spc="0" normalizeH="0" baseline="0" noProof="0" dirty="0">
@@ -7768,7 +7768,7 @@
                 <a:ea typeface="+mn-ea"/>
                 <a:cs typeface="+mn-cs"/>
               </a:rPr>
-              <a:t> </a:t>
+              <a:t/>
             </a:r>
             <a:r>
               <a:rPr kumimoji="0" lang="en-US" sz="2000" b="0" i="0" u="none" strike="noStrike" kern="1200" cap="none" spc="0" normalizeH="0" baseline="0" noProof="0" dirty="0" err="1">
@@ -7785,7 +7785,7 @@
                 <a:ea typeface="+mn-ea"/>
                 <a:cs typeface="+mn-cs"/>
               </a:rPr>
-              <a:t>жайгаштырышы</a:t>
+              <a:t/>
             </a:r>
             <a:r>
               <a:rPr kumimoji="0" lang="en-US" sz="2000" b="0" i="0" u="none" strike="noStrike" kern="1200" cap="none" spc="0" normalizeH="0" baseline="0" noProof="0" dirty="0">
@@ -7802,7 +7802,7 @@
                 <a:ea typeface="+mn-ea"/>
                 <a:cs typeface="+mn-cs"/>
               </a:rPr>
-              <a:t> </a:t>
+              <a:t/>
             </a:r>
             <a:r>
               <a:rPr kumimoji="0" lang="en-US" sz="2000" b="0" i="0" u="none" strike="noStrike" kern="1200" cap="none" spc="0" normalizeH="0" baseline="0" noProof="0" dirty="0" err="1">
@@ -7819,7 +7819,7 @@
                 <a:ea typeface="+mn-ea"/>
                 <a:cs typeface="+mn-cs"/>
               </a:rPr>
-              <a:t>керек</a:t>
+              <a:t/>
             </a:r>
             <a:r>
               <a:rPr kumimoji="0" lang="en-US" sz="2000" b="0" i="0" u="none" strike="noStrike" kern="1200" cap="none" spc="0" normalizeH="0" baseline="0" noProof="0" dirty="0">
@@ -7836,7 +7836,7 @@
                 <a:ea typeface="+mn-ea"/>
                 <a:cs typeface="+mn-cs"/>
               </a:rPr>
-              <a:t>.</a:t>
+              <a:t/>
             </a:r>
           </a:p>
           <a:p>
@@ -9152,7 +9152,7 @@
             <a:pPr algn="ctr"/>
             <a:r>
               <a:rPr lang="en-GB" sz="8000" dirty="0"/>
-              <a:t>3.15</a:t>
+              <a:t>3,15</a:t>
             </a:r>
           </a:p>
         </p:txBody>
@@ -9223,7 +9223,7 @@
             <a:pPr algn="ctr"/>
             <a:r>
               <a:rPr lang="en-GB" sz="8000" dirty="0"/>
-              <a:t>0.05</a:t>
+              <a:t>0,05</a:t>
             </a:r>
           </a:p>
         </p:txBody>
@@ -10190,7 +10190,7 @@
             <a:pPr algn="ctr"/>
             <a:r>
               <a:rPr lang="en-GB" sz="8000" dirty="0"/>
-              <a:t>15.4</a:t>
+              <a:t>15,4</a:t>
             </a:r>
           </a:p>
         </p:txBody>
@@ -10261,7 +10261,7 @@
             <a:pPr algn="ctr"/>
             <a:r>
               <a:rPr lang="en-GB" sz="8000" dirty="0"/>
-              <a:t>0.7</a:t>
+              <a:t>0,7</a:t>
             </a:r>
           </a:p>
         </p:txBody>
@@ -11228,7 +11228,7 @@
             <a:pPr algn="ctr"/>
             <a:r>
               <a:rPr lang="en-GB" sz="8000" dirty="0"/>
-              <a:t>1.26</a:t>
+              <a:t>1,26</a:t>
             </a:r>
           </a:p>
         </p:txBody>
@@ -11299,7 +11299,7 @@
             <a:pPr algn="ctr"/>
             <a:r>
               <a:rPr lang="en-GB" sz="8000" dirty="0"/>
-              <a:t>0.03</a:t>
+              <a:t>0,03</a:t>
             </a:r>
           </a:p>
         </p:txBody>
@@ -12266,7 +12266,7 @@
             <a:pPr algn="ctr"/>
             <a:r>
               <a:rPr lang="en-GB" sz="8000" dirty="0"/>
-              <a:t>1.65</a:t>
+              <a:t>1,65</a:t>
             </a:r>
           </a:p>
         </p:txBody>
@@ -12337,7 +12337,7 @@
             <a:pPr algn="ctr"/>
             <a:r>
               <a:rPr lang="en-GB" sz="8000" dirty="0"/>
-              <a:t>0.11</a:t>
+              <a:t>0,11</a:t>
             </a:r>
           </a:p>
         </p:txBody>
@@ -13304,7 +13304,7 @@
             <a:pPr algn="ctr"/>
             <a:r>
               <a:rPr lang="en-GB" sz="8000" dirty="0"/>
-              <a:t>3.8</a:t>
+              <a:t>3,8</a:t>
             </a:r>
           </a:p>
         </p:txBody>
@@ -13375,7 +13375,7 @@
             <a:pPr algn="ctr"/>
             <a:r>
               <a:rPr lang="en-GB" sz="8000" dirty="0"/>
-              <a:t>0.2</a:t>
+              <a:t>0,2</a:t>
             </a:r>
           </a:p>
         </p:txBody>
@@ -14413,7 +14413,7 @@
             <a:pPr algn="ctr"/>
             <a:r>
               <a:rPr lang="en-GB" sz="8000" dirty="0"/>
-              <a:t>0.8</a:t>
+              <a:t>0,8</a:t>
             </a:r>
           </a:p>
         </p:txBody>
@@ -15380,7 +15380,7 @@
             <a:pPr algn="ctr"/>
             <a:r>
               <a:rPr lang="en-GB" sz="8000" dirty="0"/>
-              <a:t>0.6</a:t>
+              <a:t>0,6</a:t>
             </a:r>
           </a:p>
         </p:txBody>
@@ -15451,7 +15451,7 @@
             <a:pPr algn="ctr"/>
             <a:r>
               <a:rPr lang="en-GB" sz="8000" dirty="0"/>
-              <a:t>0.03</a:t>
+              <a:t>0,03</a:t>
             </a:r>
           </a:p>
         </p:txBody>
@@ -16418,7 +16418,7 @@
             <a:pPr algn="ctr"/>
             <a:r>
               <a:rPr lang="en-GB" sz="8000" dirty="0"/>
-              <a:t>23.4</a:t>
+              <a:t>23,4</a:t>
             </a:r>
           </a:p>
         </p:txBody>
@@ -16489,7 +16489,7 @@
             <a:pPr algn="ctr"/>
             <a:r>
               <a:rPr lang="en-GB" sz="8000" dirty="0"/>
-              <a:t>0.9</a:t>
+              <a:t>0,9</a:t>
             </a:r>
           </a:p>
         </p:txBody>
@@ -17456,7 +17456,7 @@
             <a:pPr algn="ctr"/>
             <a:r>
               <a:rPr lang="en-GB" sz="8000" dirty="0"/>
-              <a:t>0.96</a:t>
+              <a:t>0,96</a:t>
             </a:r>
           </a:p>
         </p:txBody>
@@ -17527,7 +17527,7 @@
             <a:pPr algn="ctr"/>
             <a:r>
               <a:rPr lang="en-GB" sz="8000" dirty="0"/>
-              <a:t>0.12</a:t>
+              <a:t>0,12</a:t>
             </a:r>
           </a:p>
         </p:txBody>
@@ -18494,7 +18494,7 @@
             <a:pPr algn="ctr"/>
             <a:r>
               <a:rPr lang="en-GB" sz="8000" dirty="0"/>
-              <a:t>1.05</a:t>
+              <a:t>1,05</a:t>
             </a:r>
           </a:p>
         </p:txBody>
@@ -18565,7 +18565,7 @@
             <a:pPr algn="ctr"/>
             <a:r>
               <a:rPr lang="en-GB" sz="8000" dirty="0"/>
-              <a:t>0.15</a:t>
+              <a:t>0,15</a:t>
             </a:r>
           </a:p>
         </p:txBody>
@@ -31720,7 +31720,7 @@
             <a:pPr algn="ctr"/>
             <a:r>
               <a:rPr lang="en-GB" sz="8000" dirty="0"/>
-              <a:t>3.9</a:t>
+              <a:t>3,9</a:t>
             </a:r>
           </a:p>
         </p:txBody>
@@ -31791,7 +31791,7 @@
             <a:pPr algn="ctr"/>
             <a:r>
               <a:rPr lang="en-GB" sz="8000" dirty="0"/>
-              <a:t>0.3</a:t>
+              <a:t>0,3</a:t>
             </a:r>
           </a:p>
         </p:txBody>
@@ -32830,7 +32830,7 @@
             <a:pPr algn="ctr"/>
             <a:r>
               <a:rPr lang="en-GB" sz="8000" dirty="0"/>
-              <a:t>0.5</a:t>
+              <a:t>0,5</a:t>
             </a:r>
           </a:p>
         </p:txBody>
@@ -33797,7 +33797,7 @@
             <a:pPr algn="ctr"/>
             <a:r>
               <a:rPr lang="en-GB" sz="8000" dirty="0"/>
-              <a:t>1.08</a:t>
+              <a:t>1,08</a:t>
             </a:r>
           </a:p>
         </p:txBody>
@@ -33868,7 +33868,7 @@
             <a:pPr algn="ctr"/>
             <a:r>
               <a:rPr lang="en-GB" sz="8000" dirty="0"/>
-              <a:t>0.04</a:t>
+              <a:t>0,04</a:t>
             </a:r>
           </a:p>
         </p:txBody>
@@ -34835,7 +34835,7 @@
             <a:pPr algn="ctr"/>
             <a:r>
               <a:rPr lang="en-GB" sz="8000" dirty="0"/>
-              <a:t>0.42</a:t>
+              <a:t>0,42</a:t>
             </a:r>
           </a:p>
         </p:txBody>
@@ -34906,7 +34906,7 @@
             <a:pPr algn="ctr"/>
             <a:r>
               <a:rPr lang="en-GB" sz="8000" dirty="0"/>
-              <a:t>0.14</a:t>
+              <a:t>0,14</a:t>
             </a:r>
           </a:p>
         </p:txBody>
@@ -35873,7 +35873,7 @@
             <a:pPr algn="ctr"/>
             <a:r>
               <a:rPr lang="en-GB" sz="8000" dirty="0"/>
-              <a:t>5.6</a:t>
+              <a:t>5,6</a:t>
             </a:r>
           </a:p>
         </p:txBody>
@@ -35944,7 +35944,7 @@
             <a:pPr algn="ctr"/>
             <a:r>
               <a:rPr lang="en-GB" sz="8000" dirty="0"/>
-              <a:t>0.4</a:t>
+              <a:t>0,4</a:t>
             </a:r>
           </a:p>
         </p:txBody>
@@ -36911,7 +36911,7 @@
             <a:pPr algn="ctr"/>
             <a:r>
               <a:rPr lang="en-GB" sz="8000" dirty="0"/>
-              <a:t>14.4</a:t>
+              <a:t>14,4</a:t>
             </a:r>
           </a:p>
         </p:txBody>
@@ -36982,7 +36982,7 @@
             <a:pPr algn="ctr"/>
             <a:r>
               <a:rPr lang="en-GB" sz="8000" dirty="0"/>
-              <a:t>0.6</a:t>
+              <a:t>0,6</a:t>
             </a:r>
           </a:p>
         </p:txBody>
